--- a/docs/LC50 VALUE PREDICTION.pptx
+++ b/docs/LC50 VALUE PREDICTION.pptx
@@ -124,16 +124,16 @@
             <p14:sldId id="298"/>
             <p14:sldId id="313"/>
             <p14:sldId id="301"/>
-            <p14:sldId id="300"/>
             <p14:sldId id="302"/>
-            <p14:sldId id="304"/>
             <p14:sldId id="314"/>
             <p14:sldId id="316"/>
-            <p14:sldId id="315"/>
             <p14:sldId id="321"/>
             <p14:sldId id="322"/>
             <p14:sldId id="323"/>
             <p14:sldId id="324"/>
+            <p14:sldId id="315"/>
+            <p14:sldId id="300"/>
+            <p14:sldId id="304"/>
           </p14:sldIdLst>
         </p14:section>
       </p14:sectionLst>
@@ -5035,15 +5035,17 @@
             </a:pPr>
             <a:r>
               <a:rPr lang="en-IN" altLang="en-US" sz="2000" dirty="0">
+                <a:latin typeface="Arial" panose="020B0604020202020204" pitchFamily="34" charset="0"/>
                 <a:ea typeface="Arial" panose="020B0604020202020204"/>
-                <a:cs typeface="Arial" panose="020B0604020202020204"/>
+                <a:cs typeface="Arial" panose="020B0604020202020204" pitchFamily="34" charset="0"/>
                 <a:sym typeface="Arial" panose="020B0604020202020204"/>
               </a:rPr>
               <a:t>Due to small size of data, data is stored in local as csv file.</a:t>
             </a:r>
             <a:endParaRPr lang="en-US" sz="2000" dirty="0">
+              <a:latin typeface="Arial" panose="020B0604020202020204" pitchFamily="34" charset="0"/>
               <a:ea typeface="Arial" panose="020B0604020202020204"/>
-              <a:cs typeface="Arial" panose="020B0604020202020204"/>
+              <a:cs typeface="Arial" panose="020B0604020202020204" pitchFamily="34" charset="0"/>
               <a:sym typeface="Arial" panose="020B0604020202020204"/>
             </a:endParaRPr>
           </a:p>
@@ -5064,15 +5066,17 @@
             </a:pPr>
             <a:r>
               <a:rPr lang="en-IN" altLang="en-US" sz="2000" dirty="0">
+                <a:latin typeface="Arial" panose="020B0604020202020204" pitchFamily="34" charset="0"/>
                 <a:ea typeface="Arial" panose="020B0604020202020204"/>
-                <a:cs typeface="Arial" panose="020B0604020202020204"/>
+                <a:cs typeface="Arial" panose="020B0604020202020204" pitchFamily="34" charset="0"/>
                 <a:sym typeface="Arial" panose="020B0604020202020204"/>
               </a:rPr>
               <a:t>During training and evaluation a lot of data are retrieved about hyper-parameter optimization, model evaluation, loss functions, and time deltas.</a:t>
             </a:r>
             <a:endParaRPr lang="en-IN" altLang="en-US" sz="2000" dirty="0">
+              <a:latin typeface="Arial" panose="020B0604020202020204" pitchFamily="34" charset="0"/>
               <a:ea typeface="Arial" panose="020B0604020202020204"/>
-              <a:cs typeface="Arial" panose="020B0604020202020204"/>
+              <a:cs typeface="Arial" panose="020B0604020202020204" pitchFamily="34" charset="0"/>
               <a:sym typeface="Arial" panose="020B0604020202020204"/>
             </a:endParaRPr>
           </a:p>
@@ -5205,61 +5209,110 @@
             <a:pPr algn="just"/>
             <a:r>
               <a:rPr lang="en-US" sz="2000" b="1" dirty="0"/>
-              <a:t>•Cross-Validation Setup</a:t>
-            </a:r>
-            <a:endParaRPr lang="en-US" sz="2000" b="1" dirty="0"/>
+              <a:t>•</a:t>
+            </a:r>
+            <a:r>
+              <a:rPr lang="en-US" sz="2000" b="1" dirty="0">
+                <a:latin typeface="Arial" panose="020B0604020202020204" pitchFamily="34" charset="0"/>
+                <a:cs typeface="Arial" panose="020B0604020202020204" pitchFamily="34" charset="0"/>
+              </a:rPr>
+              <a:t>Cross-Validation Setup</a:t>
+            </a:r>
+            <a:endParaRPr lang="en-US" sz="2000" b="1" dirty="0">
+              <a:latin typeface="Arial" panose="020B0604020202020204" pitchFamily="34" charset="0"/>
+              <a:cs typeface="Arial" panose="020B0604020202020204" pitchFamily="34" charset="0"/>
+            </a:endParaRPr>
           </a:p>
           <a:p>
             <a:pPr algn="just"/>
             <a:r>
-              <a:rPr lang="en-IN" altLang="en-US" dirty="0"/>
+              <a:rPr lang="en-IN" altLang="en-US" dirty="0">
+                <a:latin typeface="Arial" panose="020B0604020202020204" pitchFamily="34" charset="0"/>
+                <a:cs typeface="Arial" panose="020B0604020202020204" pitchFamily="34" charset="0"/>
+              </a:rPr>
               <a:t>	</a:t>
             </a:r>
             <a:r>
-              <a:rPr lang="en-US" dirty="0"/>
+              <a:rPr lang="en-US" dirty="0">
+                <a:latin typeface="Arial" panose="020B0604020202020204" pitchFamily="34" charset="0"/>
+                <a:cs typeface="Arial" panose="020B0604020202020204" pitchFamily="34" charset="0"/>
+              </a:rPr>
               <a:t>To mitigate the risk of overfitting during the model training phase, we implemented a robust cross-validation setup.</a:t>
             </a:r>
-            <a:endParaRPr lang="en-US" dirty="0"/>
+            <a:endParaRPr lang="en-US" dirty="0">
+              <a:latin typeface="Arial" panose="020B0604020202020204" pitchFamily="34" charset="0"/>
+              <a:cs typeface="Arial" panose="020B0604020202020204" pitchFamily="34" charset="0"/>
+            </a:endParaRPr>
           </a:p>
           <a:p>
             <a:pPr algn="just"/>
             <a:r>
-              <a:rPr lang="en-US" sz="2000" b="1" dirty="0"/>
+              <a:rPr lang="en-US" sz="2000" b="1" dirty="0">
+                <a:latin typeface="Arial" panose="020B0604020202020204" pitchFamily="34" charset="0"/>
+                <a:cs typeface="Arial" panose="020B0604020202020204" pitchFamily="34" charset="0"/>
+              </a:rPr>
               <a:t>•Hyper-Parameter Optimization</a:t>
             </a:r>
-            <a:endParaRPr lang="en-US" sz="2000" b="1" dirty="0"/>
+            <a:endParaRPr lang="en-US" sz="2000" b="1" dirty="0">
+              <a:latin typeface="Arial" panose="020B0604020202020204" pitchFamily="34" charset="0"/>
+              <a:cs typeface="Arial" panose="020B0604020202020204" pitchFamily="34" charset="0"/>
+            </a:endParaRPr>
           </a:p>
           <a:p>
             <a:pPr algn="just"/>
             <a:r>
-              <a:rPr lang="en-IN" altLang="en-US" dirty="0"/>
+              <a:rPr lang="en-IN" altLang="en-US" dirty="0">
+                <a:latin typeface="Arial" panose="020B0604020202020204" pitchFamily="34" charset="0"/>
+                <a:cs typeface="Arial" panose="020B0604020202020204" pitchFamily="34" charset="0"/>
+              </a:rPr>
               <a:t>	</a:t>
             </a:r>
             <a:r>
-              <a:rPr lang="en-US" dirty="0"/>
+              <a:rPr lang="en-US" dirty="0">
+                <a:latin typeface="Arial" panose="020B0604020202020204" pitchFamily="34" charset="0"/>
+                <a:cs typeface="Arial" panose="020B0604020202020204" pitchFamily="34" charset="0"/>
+              </a:rPr>
               <a:t>In order to optimize the hyperparameters of our models, we employed the sophisticated Optuna framework. Our approach involved defining an objective function that was executed for a sample run with a random fold, allowing us to identify the best hyperparameters.</a:t>
             </a:r>
-            <a:endParaRPr lang="en-US" dirty="0"/>
+            <a:endParaRPr lang="en-US" dirty="0">
+              <a:latin typeface="Arial" panose="020B0604020202020204" pitchFamily="34" charset="0"/>
+              <a:cs typeface="Arial" panose="020B0604020202020204" pitchFamily="34" charset="0"/>
+            </a:endParaRPr>
           </a:p>
           <a:p>
             <a:pPr algn="just"/>
             <a:r>
-              <a:rPr lang="en-US" sz="2000" b="1" dirty="0"/>
+              <a:rPr lang="en-US" sz="2000" b="1" dirty="0">
+                <a:latin typeface="Arial" panose="020B0604020202020204" pitchFamily="34" charset="0"/>
+                <a:cs typeface="Arial" panose="020B0604020202020204" pitchFamily="34" charset="0"/>
+              </a:rPr>
               <a:t>•Model Evaluation</a:t>
             </a:r>
-            <a:endParaRPr lang="en-US" sz="2000" b="1" dirty="0"/>
+            <a:endParaRPr lang="en-US" sz="2000" b="1" dirty="0">
+              <a:latin typeface="Arial" panose="020B0604020202020204" pitchFamily="34" charset="0"/>
+              <a:cs typeface="Arial" panose="020B0604020202020204" pitchFamily="34" charset="0"/>
+            </a:endParaRPr>
           </a:p>
           <a:p>
             <a:pPr algn="just"/>
             <a:r>
-              <a:rPr lang="en-IN" altLang="en-US" dirty="0"/>
+              <a:rPr lang="en-IN" altLang="en-US" dirty="0">
+                <a:latin typeface="Arial" panose="020B0604020202020204" pitchFamily="34" charset="0"/>
+                <a:cs typeface="Arial" panose="020B0604020202020204" pitchFamily="34" charset="0"/>
+              </a:rPr>
               <a:t>	</a:t>
             </a:r>
             <a:r>
-              <a:rPr lang="en-US" dirty="0"/>
+              <a:rPr lang="en-US" dirty="0">
+                <a:latin typeface="Arial" panose="020B0604020202020204" pitchFamily="34" charset="0"/>
+                <a:cs typeface="Arial" panose="020B0604020202020204" pitchFamily="34" charset="0"/>
+              </a:rPr>
               <a:t>The test dataset, constituting 1/15th of the overall dataset, was employed to assess the performance of the model. The hyperparameter optimization process focused on minimizing the root mean square error (RMSE) as a measure of accuracy.</a:t>
             </a:r>
-            <a:endParaRPr lang="en-US" dirty="0"/>
+            <a:endParaRPr lang="en-US" dirty="0">
+              <a:latin typeface="Arial" panose="020B0604020202020204" pitchFamily="34" charset="0"/>
+              <a:cs typeface="Arial" panose="020B0604020202020204" pitchFamily="34" charset="0"/>
+            </a:endParaRPr>
           </a:p>
         </p:txBody>
       </p:sp>
@@ -5325,7 +5378,7 @@
         <p:spPr>
           <a:xfrm>
             <a:off x="1066800" y="2014855"/>
-            <a:ext cx="10663555" cy="3784600"/>
+            <a:ext cx="10663555" cy="4092575"/>
           </a:xfrm>
           <a:prstGeom prst="rect">
             <a:avLst/>
@@ -5494,9 +5547,29 @@
                 <a:latin typeface="Calibri" panose="020F0502020204030204" pitchFamily="34" charset="0"/>
                 <a:cs typeface="Calibri" panose="020F0502020204030204" pitchFamily="34" charset="0"/>
               </a:rPr>
-              <a:t>The fully operational code was obtained from the code repository using Git and deployed on an AWS EC2 instance. </a:t>
+              <a:t>The fully operational code was obtained from the code repository using Git and deployed on an AWS EC2 instance.  It can be found at - </a:t>
             </a:r>
             <a:endParaRPr lang="en-US" sz="2000" dirty="0">
+              <a:latin typeface="Calibri" panose="020F0502020204030204" pitchFamily="34" charset="0"/>
+              <a:cs typeface="Calibri" panose="020F0502020204030204" pitchFamily="34" charset="0"/>
+            </a:endParaRPr>
+          </a:p>
+          <a:p>
+            <a:pPr algn="just"/>
+            <a:r>
+              <a:rPr lang="en-US" sz="2000" u="sng" dirty="0">
+                <a:solidFill>
+                  <a:srgbClr val="0070C0"/>
+                </a:solidFill>
+                <a:latin typeface="Calibri" panose="020F0502020204030204" pitchFamily="34" charset="0"/>
+                <a:cs typeface="Calibri" panose="020F0502020204030204" pitchFamily="34" charset="0"/>
+              </a:rPr>
+              <a:t>http://ec2-43-204-230-6.ap-south-1.compute.amazonaws.com:3000/</a:t>
+            </a:r>
+            <a:endParaRPr lang="en-US" sz="2000" u="sng" dirty="0">
+              <a:solidFill>
+                <a:srgbClr val="0070C0"/>
+              </a:solidFill>
               <a:latin typeface="Calibri" panose="020F0502020204030204" pitchFamily="34" charset="0"/>
               <a:cs typeface="Calibri" panose="020F0502020204030204" pitchFamily="34" charset="0"/>
             </a:endParaRPr>

--- a/docs/LC50 VALUE PREDICTION.pptx
+++ b/docs/LC50 VALUE PREDICTION.pptx
@@ -123,8 +123,7 @@
           <p14:sldIdLst>
             <p14:sldId id="298"/>
             <p14:sldId id="313"/>
-            <p14:sldId id="301"/>
-            <p14:sldId id="302"/>
+            <p14:sldId id="304"/>
             <p14:sldId id="314"/>
             <p14:sldId id="316"/>
             <p14:sldId id="321"/>
@@ -132,8 +131,9 @@
             <p14:sldId id="323"/>
             <p14:sldId id="324"/>
             <p14:sldId id="315"/>
+            <p14:sldId id="301"/>
             <p14:sldId id="300"/>
-            <p14:sldId id="304"/>
+            <p14:sldId id="302"/>
           </p14:sldIdLst>
         </p14:section>
       </p14:sectionLst>
@@ -4212,7 +4212,7 @@
         <p:spPr>
           <a:xfrm>
             <a:off x="1168400" y="2190115"/>
-            <a:ext cx="8706485" cy="3415030"/>
+            <a:ext cx="8706485" cy="3969385"/>
           </a:xfrm>
           <a:prstGeom prst="rect">
             <a:avLst/>
@@ -4227,31 +4227,46 @@
             <a:pPr algn="just"/>
             <a:r>
               <a:rPr lang="en-US" dirty="0">
+                <a:latin typeface="Arial" panose="020B0604020202020204" pitchFamily="34" charset="0"/>
+                <a:cs typeface="Arial" panose="020B0604020202020204" pitchFamily="34" charset="0"/>
                 <a:sym typeface="+mn-ea"/>
               </a:rPr>
               <a:t>The problem addressed in this project is to develop robust and accurate QSAR models for predicting the LC50 value, a measure of the concentration of a substance that causes 50% mortality in test organisms, of potentially hazardous chemical compounds.</a:t>
             </a:r>
             <a:endParaRPr lang="en-US" dirty="0">
+              <a:latin typeface="Arial" panose="020B0604020202020204" pitchFamily="34" charset="0"/>
+              <a:cs typeface="Arial" panose="020B0604020202020204" pitchFamily="34" charset="0"/>
               <a:sym typeface="+mn-ea"/>
             </a:endParaRPr>
           </a:p>
           <a:p>
             <a:pPr algn="just"/>
-            <a:endParaRPr lang="en-US"/>
+            <a:endParaRPr lang="en-US">
+              <a:latin typeface="Arial" panose="020B0604020202020204" pitchFamily="34" charset="0"/>
+              <a:cs typeface="Arial" panose="020B0604020202020204" pitchFamily="34" charset="0"/>
+            </a:endParaRPr>
           </a:p>
           <a:p>
             <a:pPr algn="just"/>
             <a:r>
               <a:rPr lang="en-US" dirty="0">
+                <a:latin typeface="Arial" panose="020B0604020202020204" pitchFamily="34" charset="0"/>
+                <a:cs typeface="Arial" panose="020B0604020202020204" pitchFamily="34" charset="0"/>
                 <a:sym typeface="+mn-ea"/>
               </a:rPr>
               <a:t>The proposed solution for the problem involves the development and evaluation of QSAR models based on molecular descriptors to predict LC50 values. The models will be trained on a dataset of compounds with known LC50 values and molecular descriptors. The performance of the models will be evaluated using statistical measures such as correlation coefficient, root mean square error, and coefficient of determination. The resulting models can be used to predict the toxicity of new compounds, which can be useful in environmental risk assessment, and chemical safety evaluation.</a:t>
             </a:r>
-            <a:endParaRPr lang="en-US" dirty="0"/>
+            <a:endParaRPr lang="en-US" dirty="0">
+              <a:latin typeface="Arial" panose="020B0604020202020204" pitchFamily="34" charset="0"/>
+              <a:cs typeface="Arial" panose="020B0604020202020204" pitchFamily="34" charset="0"/>
+            </a:endParaRPr>
           </a:p>
           <a:p>
             <a:pPr algn="just"/>
-            <a:endParaRPr lang="en-US"/>
+            <a:endParaRPr lang="en-US">
+              <a:latin typeface="Arial" panose="020B0604020202020204" pitchFamily="34" charset="0"/>
+              <a:cs typeface="Arial" panose="020B0604020202020204" pitchFamily="34" charset="0"/>
+            </a:endParaRPr>
           </a:p>
         </p:txBody>
       </p:sp>
@@ -4610,6 +4625,8 @@
                           <a:solidFill>
                             <a:schemeClr val="tx1"/>
                           </a:solidFill>
+                          <a:latin typeface="Arial" panose="020B0604020202020204" pitchFamily="34" charset="0"/>
+                          <a:cs typeface="Arial" panose="020B0604020202020204" pitchFamily="34" charset="0"/>
                         </a:rPr>
                         <a:t>All the data was in numerical. To be precise, the datatype was float32 for all.</a:t>
                       </a:r>
@@ -4618,6 +4635,8 @@
                           <a:solidFill>
                             <a:schemeClr val="tx1"/>
                           </a:solidFill>
+                          <a:latin typeface="Arial" panose="020B0604020202020204" pitchFamily="34" charset="0"/>
+                          <a:cs typeface="Arial" panose="020B0604020202020204" pitchFamily="34" charset="0"/>
                         </a:rPr>
                         <a:t>.</a:t>
                       </a:r>
@@ -4625,6 +4644,8 @@
                         <a:solidFill>
                           <a:schemeClr val="tx1"/>
                         </a:solidFill>
+                        <a:latin typeface="Arial" panose="020B0604020202020204" pitchFamily="34" charset="0"/>
+                        <a:cs typeface="Arial" panose="020B0604020202020204" pitchFamily="34" charset="0"/>
                       </a:endParaRPr>
                     </a:p>
                   </a:txBody>
@@ -4657,6 +4678,8 @@
                           <a:solidFill>
                             <a:schemeClr val="tx1"/>
                           </a:solidFill>
+                          <a:latin typeface="Arial" panose="020B0604020202020204" pitchFamily="34" charset="0"/>
+                          <a:cs typeface="Arial" panose="020B0604020202020204" pitchFamily="34" charset="0"/>
                         </a:rPr>
                         <a:t>Considering the number of datapoints, there was no nullvalues in collected data.</a:t>
                       </a:r>
@@ -4664,6 +4687,8 @@
                         <a:solidFill>
                           <a:schemeClr val="tx1"/>
                         </a:solidFill>
+                        <a:latin typeface="Arial" panose="020B0604020202020204" pitchFamily="34" charset="0"/>
+                        <a:cs typeface="Arial" panose="020B0604020202020204" pitchFamily="34" charset="0"/>
                       </a:endParaRPr>
                     </a:p>
                   </a:txBody>
@@ -4712,6 +4737,8 @@
                           <a:solidFill>
                             <a:schemeClr val="tx1"/>
                           </a:solidFill>
+                          <a:latin typeface="Arial" panose="020B0604020202020204" pitchFamily="34" charset="0"/>
+                          <a:cs typeface="Arial" panose="020B0604020202020204" pitchFamily="34" charset="0"/>
                         </a:rPr>
                         <a:t>New data points were created by introducing gaussian noise to the raw data.</a:t>
                       </a:r>
@@ -4719,6 +4746,8 @@
                         <a:solidFill>
                           <a:schemeClr val="tx1"/>
                         </a:solidFill>
+                        <a:latin typeface="Arial" panose="020B0604020202020204" pitchFamily="34" charset="0"/>
+                        <a:cs typeface="Arial" panose="020B0604020202020204" pitchFamily="34" charset="0"/>
                       </a:endParaRPr>
                     </a:p>
                   </a:txBody>
@@ -4751,6 +4780,8 @@
                           <a:solidFill>
                             <a:schemeClr val="tx1"/>
                           </a:solidFill>
+                          <a:latin typeface="Arial" panose="020B0604020202020204" pitchFamily="34" charset="0"/>
+                          <a:cs typeface="Arial" panose="020B0604020202020204" pitchFamily="34" charset="0"/>
                         </a:rPr>
                         <a:t>As all columns are numeric, no encoding is used.</a:t>
                       </a:r>
@@ -4758,6 +4789,8 @@
                         <a:solidFill>
                           <a:schemeClr val="tx1"/>
                         </a:solidFill>
+                        <a:latin typeface="Arial" panose="020B0604020202020204" pitchFamily="34" charset="0"/>
+                        <a:cs typeface="Arial" panose="020B0604020202020204" pitchFamily="34" charset="0"/>
                       </a:endParaRPr>
                     </a:p>
                   </a:txBody>
@@ -4791,6 +4824,8 @@
                         <a:solidFill>
                           <a:schemeClr val="tx1"/>
                         </a:solidFill>
+                        <a:latin typeface="Arial" panose="020B0604020202020204" pitchFamily="34" charset="0"/>
+                        <a:cs typeface="Arial" panose="020B0604020202020204" pitchFamily="34" charset="0"/>
                       </a:endParaRPr>
                     </a:p>
                   </a:txBody>
@@ -4827,6 +4862,8 @@
                         <a:solidFill>
                           <a:schemeClr val="tx1"/>
                         </a:solidFill>
+                        <a:latin typeface="Arial" panose="020B0604020202020204" pitchFamily="34" charset="0"/>
+                        <a:cs typeface="Arial" panose="020B0604020202020204" pitchFamily="34" charset="0"/>
                       </a:endParaRPr>
                     </a:p>
                   </a:txBody>
@@ -4864,6 +4901,8 @@
                           <a:solidFill>
                             <a:schemeClr val="tx1"/>
                           </a:solidFill>
+                          <a:latin typeface="Arial" panose="020B0604020202020204" pitchFamily="34" charset="0"/>
+                          <a:cs typeface="Arial" panose="020B0604020202020204" pitchFamily="34" charset="0"/>
                         </a:rPr>
                         <a:t>SMOGN algorithm is used to add extra 20% to the initial dataset.</a:t>
                       </a:r>
@@ -4871,6 +4910,8 @@
                         <a:solidFill>
                           <a:schemeClr val="tx1"/>
                         </a:solidFill>
+                        <a:latin typeface="Arial" panose="020B0604020202020204" pitchFamily="34" charset="0"/>
+                        <a:cs typeface="Arial" panose="020B0604020202020204" pitchFamily="34" charset="0"/>
                       </a:endParaRPr>
                     </a:p>
                   </a:txBody>
@@ -4908,6 +4949,8 @@
                           <a:solidFill>
                             <a:schemeClr val="tx1"/>
                           </a:solidFill>
+                          <a:latin typeface="Arial" panose="020B0604020202020204" pitchFamily="34" charset="0"/>
+                          <a:cs typeface="Arial" panose="020B0604020202020204" pitchFamily="34" charset="0"/>
                         </a:rPr>
                         <a:t>Standard and min-max scaler is used iteratively for testing.</a:t>
                       </a:r>
@@ -4915,6 +4958,8 @@
                         <a:solidFill>
                           <a:schemeClr val="tx1"/>
                         </a:solidFill>
+                        <a:latin typeface="Arial" panose="020B0604020202020204" pitchFamily="34" charset="0"/>
+                        <a:cs typeface="Arial" panose="020B0604020202020204" pitchFamily="34" charset="0"/>
                       </a:endParaRPr>
                     </a:p>
                   </a:txBody>
